--- a/Reports/Tata_Power_Equity_Research_Valuation_Presentation.pptx
+++ b/Reports/Tata_Power_Equity_Research_Valuation_Presentation.pptx
@@ -129,7 +129,7 @@
   <pc:docChgLst>
     <pc:chgData name="MONOJIT SAMANTA" userId="c6a1b9be0e9f5584" providerId="LiveId" clId="{630F4618-FCEF-4AE5-B5B1-D0D9B2595B7F}"/>
     <pc:docChg chg="custSel modSld">
-      <pc:chgData name="MONOJIT SAMANTA" userId="c6a1b9be0e9f5584" providerId="LiveId" clId="{630F4618-FCEF-4AE5-B5B1-D0D9B2595B7F}" dt="2026-08-14T20:16:58.877" v="22" actId="14100"/>
+      <pc:chgData name="MONOJIT SAMANTA" userId="c6a1b9be0e9f5584" providerId="LiveId" clId="{630F4618-FCEF-4AE5-B5B1-D0D9B2595B7F}" dt="2026-08-15T22:54:56.968" v="50" actId="14100"/>
       <pc:docMkLst>
         <pc:docMk/>
       </pc:docMkLst>
@@ -172,6 +172,68 @@
         </pc:picChg>
       </pc:sldChg>
       <pc:sldChg chg="addSp delSp modSp mod">
+        <pc:chgData name="MONOJIT SAMANTA" userId="c6a1b9be0e9f5584" providerId="LiveId" clId="{630F4618-FCEF-4AE5-B5B1-D0D9B2595B7F}" dt="2026-08-15T22:54:56.968" v="50" actId="14100"/>
+        <pc:sldMkLst>
+          <pc:docMk/>
+          <pc:sldMk cId="0" sldId="262"/>
+        </pc:sldMkLst>
+        <pc:spChg chg="mod">
+          <ac:chgData name="MONOJIT SAMANTA" userId="c6a1b9be0e9f5584" providerId="LiveId" clId="{630F4618-FCEF-4AE5-B5B1-D0D9B2595B7F}" dt="2026-08-15T22:54:46.716" v="49" actId="14100"/>
+          <ac:spMkLst>
+            <pc:docMk/>
+            <pc:sldMk cId="0" sldId="262"/>
+            <ac:spMk id="7" creationId="{00000000-0000-0000-0000-000000000000}"/>
+          </ac:spMkLst>
+        </pc:spChg>
+        <pc:picChg chg="del">
+          <ac:chgData name="MONOJIT SAMANTA" userId="c6a1b9be0e9f5584" providerId="LiveId" clId="{630F4618-FCEF-4AE5-B5B1-D0D9B2595B7F}" dt="2026-08-15T22:52:08.079" v="23" actId="478"/>
+          <ac:picMkLst>
+            <pc:docMk/>
+            <pc:sldMk cId="0" sldId="262"/>
+            <ac:picMk id="4" creationId="{00000000-0000-0000-0000-000000000000}"/>
+          </ac:picMkLst>
+        </pc:picChg>
+        <pc:picChg chg="add mod">
+          <ac:chgData name="MONOJIT SAMANTA" userId="c6a1b9be0e9f5584" providerId="LiveId" clId="{630F4618-FCEF-4AE5-B5B1-D0D9B2595B7F}" dt="2026-08-15T22:54:56.968" v="50" actId="14100"/>
+          <ac:picMkLst>
+            <pc:docMk/>
+            <pc:sldMk cId="0" sldId="262"/>
+            <ac:picMk id="12" creationId="{F3327F9C-751A-AF4F-87B8-6681EFA8DEF3}"/>
+          </ac:picMkLst>
+        </pc:picChg>
+      </pc:sldChg>
+      <pc:sldChg chg="addSp delSp modSp mod">
+        <pc:chgData name="MONOJIT SAMANTA" userId="c6a1b9be0e9f5584" providerId="LiveId" clId="{630F4618-FCEF-4AE5-B5B1-D0D9B2595B7F}" dt="2026-08-15T22:54:04.843" v="40" actId="14100"/>
+        <pc:sldMkLst>
+          <pc:docMk/>
+          <pc:sldMk cId="0" sldId="263"/>
+        </pc:sldMkLst>
+        <pc:picChg chg="mod">
+          <ac:chgData name="MONOJIT SAMANTA" userId="c6a1b9be0e9f5584" providerId="LiveId" clId="{630F4618-FCEF-4AE5-B5B1-D0D9B2595B7F}" dt="2026-08-15T22:54:04.843" v="40" actId="14100"/>
+          <ac:picMkLst>
+            <pc:docMk/>
+            <pc:sldMk cId="0" sldId="263"/>
+            <ac:picMk id="3" creationId="{00000000-0000-0000-0000-000000000000}"/>
+          </ac:picMkLst>
+        </pc:picChg>
+        <pc:picChg chg="del">
+          <ac:chgData name="MONOJIT SAMANTA" userId="c6a1b9be0e9f5584" providerId="LiveId" clId="{630F4618-FCEF-4AE5-B5B1-D0D9B2595B7F}" dt="2026-08-15T22:52:13.906" v="24" actId="478"/>
+          <ac:picMkLst>
+            <pc:docMk/>
+            <pc:sldMk cId="0" sldId="263"/>
+            <ac:picMk id="4" creationId="{00000000-0000-0000-0000-000000000000}"/>
+          </ac:picMkLst>
+        </pc:picChg>
+        <pc:picChg chg="add mod">
+          <ac:chgData name="MONOJIT SAMANTA" userId="c6a1b9be0e9f5584" providerId="LiveId" clId="{630F4618-FCEF-4AE5-B5B1-D0D9B2595B7F}" dt="2026-08-15T22:54:02.313" v="39" actId="14100"/>
+          <ac:picMkLst>
+            <pc:docMk/>
+            <pc:sldMk cId="0" sldId="263"/>
+            <ac:picMk id="25" creationId="{A82B8CEB-ED51-F14C-1F32-CB3B94543A25}"/>
+          </ac:picMkLst>
+        </pc:picChg>
+      </pc:sldChg>
+      <pc:sldChg chg="addSp delSp modSp mod">
         <pc:chgData name="MONOJIT SAMANTA" userId="c6a1b9be0e9f5584" providerId="LiveId" clId="{630F4618-FCEF-4AE5-B5B1-D0D9B2595B7F}" dt="2026-08-14T20:16:13.784" v="12" actId="14100"/>
         <pc:sldMkLst>
           <pc:docMk/>
@@ -191,6 +253,29 @@
             <pc:docMk/>
             <pc:sldMk cId="0" sldId="264"/>
             <ac:picMk id="12" creationId="{8D4C0BFB-31D2-E449-6897-C6CEC2726467}"/>
+          </ac:picMkLst>
+        </pc:picChg>
+      </pc:sldChg>
+      <pc:sldChg chg="addSp delSp modSp mod">
+        <pc:chgData name="MONOJIT SAMANTA" userId="c6a1b9be0e9f5584" providerId="LiveId" clId="{630F4618-FCEF-4AE5-B5B1-D0D9B2595B7F}" dt="2026-08-15T22:53:06.277" v="30" actId="14100"/>
+        <pc:sldMkLst>
+          <pc:docMk/>
+          <pc:sldMk cId="0" sldId="265"/>
+        </pc:sldMkLst>
+        <pc:picChg chg="del">
+          <ac:chgData name="MONOJIT SAMANTA" userId="c6a1b9be0e9f5584" providerId="LiveId" clId="{630F4618-FCEF-4AE5-B5B1-D0D9B2595B7F}" dt="2026-08-15T22:52:19.095" v="25" actId="478"/>
+          <ac:picMkLst>
+            <pc:docMk/>
+            <pc:sldMk cId="0" sldId="265"/>
+            <ac:picMk id="3" creationId="{00000000-0000-0000-0000-000000000000}"/>
+          </ac:picMkLst>
+        </pc:picChg>
+        <pc:picChg chg="add mod">
+          <ac:chgData name="MONOJIT SAMANTA" userId="c6a1b9be0e9f5584" providerId="LiveId" clId="{630F4618-FCEF-4AE5-B5B1-D0D9B2595B7F}" dt="2026-08-15T22:53:06.277" v="30" actId="14100"/>
+          <ac:picMkLst>
+            <pc:docMk/>
+            <pc:sldMk cId="0" sldId="265"/>
+            <ac:picMk id="22" creationId="{DFA08EB6-012A-CADE-544F-9CCD0F7457E9}"/>
           </ac:picMkLst>
         </pc:picChg>
       </pc:sldChg>
@@ -2061,30 +2146,6 @@
       </p:sp>
       <p:pic>
         <p:nvPicPr>
-          <p:cNvPr id="3" name="Image 0" descr="/home/claude/charts/var_comparison.png"/>
-          <p:cNvPicPr>
-            <a:picLocks noChangeAspect="1"/>
-          </p:cNvPicPr>
-          <p:nvPr/>
-        </p:nvPicPr>
-        <p:blipFill>
-          <a:blip r:embed="rId3"/>
-          <a:stretch>
-            <a:fillRect/>
-          </a:stretch>
-        </p:blipFill>
-        <p:spPr>
-          <a:xfrm>
-            <a:off x="365759" y="1005840"/>
-            <a:ext cx="4833561" cy="3017520"/>
-          </a:xfrm>
-          <a:prstGeom prst="rect">
-            <a:avLst/>
-          </a:prstGeom>
-        </p:spPr>
-      </p:pic>
-      <p:pic>
-        <p:nvPicPr>
           <p:cNvPr id="4" name="Image 1" descr="/home/claude/charts/monte_carlo_dist.png"/>
           <p:cNvPicPr>
             <a:picLocks noChangeAspect="1"/>
@@ -2092,7 +2153,7 @@
           <p:nvPr/>
         </p:nvPicPr>
         <p:blipFill>
-          <a:blip r:embed="rId4"/>
+          <a:blip r:embed="rId3"/>
           <a:stretch>
             <a:fillRect/>
           </a:stretch>
@@ -2682,6 +2743,36 @@
           </a:p>
         </p:txBody>
       </p:sp>
+      <p:pic>
+        <p:nvPicPr>
+          <p:cNvPr id="22" name="Picture 21">
+            <a:extLst>
+              <a:ext uri="{FF2B5EF4-FFF2-40B4-BE49-F238E27FC236}">
+                <a16:creationId xmlns:a16="http://schemas.microsoft.com/office/drawing/2014/main" id="{DFA08EB6-012A-CADE-544F-9CCD0F7457E9}"/>
+              </a:ext>
+            </a:extLst>
+          </p:cNvPr>
+          <p:cNvPicPr>
+            <a:picLocks noChangeAspect="1"/>
+          </p:cNvPicPr>
+          <p:nvPr/>
+        </p:nvPicPr>
+        <p:blipFill>
+          <a:blip r:embed="rId4"/>
+          <a:stretch>
+            <a:fillRect/>
+          </a:stretch>
+        </p:blipFill>
+        <p:spPr>
+          <a:xfrm>
+            <a:off x="365760" y="1051560"/>
+            <a:ext cx="5322659" cy="2996489"/>
+          </a:xfrm>
+          <a:prstGeom prst="rect">
+            <a:avLst/>
+          </a:prstGeom>
+        </p:spPr>
+      </p:pic>
     </p:spTree>
   </p:cSld>
   <p:clrMapOvr>
@@ -7283,30 +7374,6 @@
           </a:prstGeom>
         </p:spPr>
       </p:pic>
-      <p:pic>
-        <p:nvPicPr>
-          <p:cNvPr id="4" name="Image 1" descr="/home/claude/charts/capex_trend.png"/>
-          <p:cNvPicPr>
-            <a:picLocks noChangeAspect="1"/>
-          </p:cNvPicPr>
-          <p:nvPr/>
-        </p:nvPicPr>
-        <p:blipFill>
-          <a:blip r:embed="rId4"/>
-          <a:stretch>
-            <a:fillRect/>
-          </a:stretch>
-        </p:blipFill>
-        <p:spPr>
-          <a:xfrm>
-            <a:off x="5852160" y="1005840"/>
-            <a:ext cx="5943600" cy="3280554"/>
-          </a:xfrm>
-          <a:prstGeom prst="rect">
-            <a:avLst/>
-          </a:prstGeom>
-        </p:spPr>
-      </p:pic>
       <p:sp>
         <p:nvSpPr>
           <p:cNvPr id="5" name="Shape 1"/>
@@ -7382,7 +7449,7 @@
         <p:spPr>
           <a:xfrm>
             <a:off x="548640" y="5486400"/>
-            <a:ext cx="11091672" cy="548640"/>
+            <a:ext cx="11247120" cy="548640"/>
           </a:xfrm>
           <a:prstGeom prst="roundRect">
             <a:avLst>
@@ -7528,6 +7595,36 @@
           </a:p>
         </p:txBody>
       </p:sp>
+      <p:pic>
+        <p:nvPicPr>
+          <p:cNvPr id="12" name="Picture 11">
+            <a:extLst>
+              <a:ext uri="{FF2B5EF4-FFF2-40B4-BE49-F238E27FC236}">
+                <a16:creationId xmlns:a16="http://schemas.microsoft.com/office/drawing/2014/main" id="{F3327F9C-751A-AF4F-87B8-6681EFA8DEF3}"/>
+              </a:ext>
+            </a:extLst>
+          </p:cNvPr>
+          <p:cNvPicPr>
+            <a:picLocks noChangeAspect="1"/>
+          </p:cNvPicPr>
+          <p:nvPr/>
+        </p:nvPicPr>
+        <p:blipFill>
+          <a:blip r:embed="rId4"/>
+          <a:stretch>
+            <a:fillRect/>
+          </a:stretch>
+        </p:blipFill>
+        <p:spPr>
+          <a:xfrm>
+            <a:off x="6035040" y="1005840"/>
+            <a:ext cx="5760720" cy="3280555"/>
+          </a:xfrm>
+          <a:prstGeom prst="rect">
+            <a:avLst/>
+          </a:prstGeom>
+        </p:spPr>
+      </p:pic>
     </p:spTree>
   </p:cSld>
   <p:clrMapOvr>
@@ -7616,32 +7713,8 @@
         </p:blipFill>
         <p:spPr>
           <a:xfrm>
-            <a:off x="365760" y="1005840"/>
-            <a:ext cx="5577840" cy="3482260"/>
-          </a:xfrm>
-          <a:prstGeom prst="rect">
-            <a:avLst/>
-          </a:prstGeom>
-        </p:spPr>
-      </p:pic>
-      <p:pic>
-        <p:nvPicPr>
-          <p:cNvPr id="4" name="Image 1" descr="/home/claude/charts/sensitivity_heatmap.png"/>
-          <p:cNvPicPr>
-            <a:picLocks noChangeAspect="1"/>
-          </p:cNvPicPr>
-          <p:nvPr/>
-        </p:nvPicPr>
-        <p:blipFill>
-          <a:blip r:embed="rId4"/>
-          <a:stretch>
-            <a:fillRect/>
-          </a:stretch>
-        </p:blipFill>
-        <p:spPr>
-          <a:xfrm>
-            <a:off x="6172200" y="1005840"/>
-            <a:ext cx="5577840" cy="3553439"/>
+            <a:off x="365760" y="930031"/>
+            <a:ext cx="5577840" cy="3558069"/>
           </a:xfrm>
           <a:prstGeom prst="rect">
             <a:avLst/>
@@ -8328,6 +8401,36 @@
           </a:p>
         </p:txBody>
       </p:sp>
+      <p:pic>
+        <p:nvPicPr>
+          <p:cNvPr id="25" name="Picture 24">
+            <a:extLst>
+              <a:ext uri="{FF2B5EF4-FFF2-40B4-BE49-F238E27FC236}">
+                <a16:creationId xmlns:a16="http://schemas.microsoft.com/office/drawing/2014/main" id="{A82B8CEB-ED51-F14C-1F32-CB3B94543A25}"/>
+              </a:ext>
+            </a:extLst>
+          </p:cNvPr>
+          <p:cNvPicPr>
+            <a:picLocks noChangeAspect="1"/>
+          </p:cNvPicPr>
+          <p:nvPr/>
+        </p:nvPicPr>
+        <p:blipFill>
+          <a:blip r:embed="rId4"/>
+          <a:stretch>
+            <a:fillRect/>
+          </a:stretch>
+        </p:blipFill>
+        <p:spPr>
+          <a:xfrm>
+            <a:off x="6126480" y="930031"/>
+            <a:ext cx="5658646" cy="3558069"/>
+          </a:xfrm>
+          <a:prstGeom prst="rect">
+            <a:avLst/>
+          </a:prstGeom>
+        </p:spPr>
+      </p:pic>
     </p:spTree>
   </p:cSld>
   <p:clrMapOvr>
